--- a/deliverables/VIDEO_7_Are_You_Growing_Or_Just_Being_Given_More_Work_FINAL/Recording_Support_Deck.pptx
+++ b/deliverables/VIDEO_7_Are_You_Growing_Or_Just_Being_Given_More_Work_FINAL/Recording_Support_Deck.pptx
@@ -517,19 +517,25 @@
           <a:p/>
           <a:p>
             <a:r>
-              <a:t>On screen: MORE RESPONSIBILITY CAN MEAN GROWTH. IT CAN ALSO MEAN YOU ABSORB MORE.</a:t>
+              <a:t>Status: REUSE</a:t>
             </a:r>
           </a:p>
           <a:p/>
           <a:p>
             <a:r>
-              <a:t>Script: "Maybe it is. Or maybe the organization has simply learned that you will absorb more."</a:t>
+              <a:t>On screen: MORE RESPONSIBILITY CAN MEAN GROWTH. / IT CAN ALSO MEAN YOU ABSORB MORE.</a:t>
             </a:r>
           </a:p>
           <a:p/>
           <a:p>
             <a:r>
-              <a:t>Purpose: The distinction the whole video rests on.</a:t>
+              <a:t>Script: Or maybe the organization has simply learned that you will absorb more.</a:t>
+            </a:r>
+          </a:p>
+          <a:p/>
+          <a:p>
+            <a:r>
+              <a:t>Purpose: The consequence the whole video turns on, before the CAR test is named.</a:t>
             </a:r>
           </a:p>
           <a:p>
@@ -610,13 +616,19 @@
           <a:p/>
           <a:p>
             <a:r>
+              <a:t>Status: REUSE</a:t>
+            </a:r>
+          </a:p>
+          <a:p/>
+          <a:p>
+            <a:r>
               <a:t>On screen: WATCH NEXT: HOW TO SHOW YOUR IMPACT AT WORK WHEN YOU BUILT IT FROM SCRATCH</a:t>
             </a:r>
           </a:p>
           <a:p/>
           <a:p>
             <a:r>
-              <a:t>Script: "In the next video, I will show you how to make that work visible: How to Show Your Impact at Work When You Built It From Scratch."</a:t>
+              <a:t>Script: In the next video, I will show you how to make that work visible: “How to Show Your Impact at Work When You Built It From Scratch.”</a:t>
             </a:r>
           </a:p>
           <a:p/>
@@ -703,19 +715,25 @@
           <a:p/>
           <a:p>
             <a:r>
+              <a:t>Status: REORDER</a:t>
+            </a:r>
+          </a:p>
+          <a:p/>
+          <a:p>
+            <a:r>
               <a:t>On screen: C COMPLEXITY / A AUTHORITY / R RETURN</a:t>
             </a:r>
           </a:p>
           <a:p/>
           <a:p>
             <a:r>
-              <a:t>Script: "So use the CAR test: Complexity, Authority, Return."</a:t>
+              <a:t>Script: That is the CAR test: Complexity, Authority, Return.</a:t>
             </a:r>
           </a:p>
           <a:p/>
           <a:p>
             <a:r>
-              <a:t>Purpose: The hero graphic and the memory device. Returns briefly at each section change.</a:t>
+              <a:t>Purpose: The hero framework. Returns briefly at each of the three section changes.</a:t>
             </a:r>
           </a:p>
           <a:p>
@@ -796,19 +814,25 @@
           <a:p/>
           <a:p>
             <a:r>
-              <a:t>On screen: MORE UNITS OF THE SAME PROBLEM  vs.  NEW VARIABLES, AMBIGUITY, TRADEOFFS</a:t>
+              <a:t>Status: COPY UPDATE</a:t>
             </a:r>
           </a:p>
           <a:p/>
           <a:p>
             <a:r>
-              <a:t>Script: "Did the problem become more complex, or did the volume simply increase?"</a:t>
+              <a:t>On screen: MORE OF THE SAME vs NEW VARIABLES · AMBIGUITY · TRADEOFFS</a:t>
             </a:r>
           </a:p>
           <a:p/>
           <a:p>
             <a:r>
-              <a:t>Purpose: Separates capacity use from a genuine change in the class of problem.</a:t>
+              <a:t>Script: First: Did the problem become more complex, or did the volume simply increase?</a:t>
+            </a:r>
+          </a:p>
+          <a:p/>
+          <a:p>
+            <a:r>
+              <a:t>Purpose: The first test, as a comparison the viewer can run on their own week.</a:t>
             </a:r>
           </a:p>
           <a:p>
@@ -889,24 +913,30 @@
           <a:p/>
           <a:p>
             <a:r>
-              <a:t>On screen: RESPONSIBILITY: What you carry / ACCOUNTABILITY: What you answer for / AUTHORITY: What you can influence or decide</a:t>
+              <a:t>Status: REUSE</a:t>
             </a:r>
           </a:p>
           <a:p/>
           <a:p>
             <a:r>
-              <a:t>Script: "Responsibility is what you are expected to carry. Accountability is what you will answer for. Authority is what you can influence or decide."</a:t>
+              <a:t>On screen: RESPONSIBILITY: what you carry / ACCOUNTABILITY: what you answer for / AUTHORITY: what you can influence or decide</a:t>
             </a:r>
           </a:p>
           <a:p/>
           <a:p>
             <a:r>
-              <a:t>Purpose: The distinction the section turns on.</a:t>
-            </a:r>
-          </a:p>
-          <a:p>
-            <a:r>
-              <a:t>Hold: 10 to 11 seconds</a:t>
+              <a:t>Script: Responsibility is what you are expected to carry. Accountability is what you will answer for. Authority is what you can influence or decide.</a:t>
+            </a:r>
+          </a:p>
+          <a:p/>
+          <a:p>
+            <a:r>
+              <a:t>Purpose: The distinction the second test turns on.</a:t>
+            </a:r>
+          </a:p>
+          <a:p>
+            <a:r>
+              <a:t>Hold: 9 to 10 seconds</a:t>
             </a:r>
           </a:p>
         </p:txBody>
@@ -982,24 +1012,30 @@
           <a:p/>
           <a:p>
             <a:r>
-              <a:t>On screen: WHAT DID THE WORK RETURN? / Capability, Evidence, Recognition</a:t>
+              <a:t>Status: REBUILD</a:t>
             </a:r>
           </a:p>
           <a:p/>
           <a:p>
             <a:r>
-              <a:t>Script: "I would look for return in three places: capability, evidence, and recognition."</a:t>
+              <a:t>On screen: WHAT DID THE WORK RETURN? Capability · Evidence · Recognition / PRAISE ALONE IS NOT ROLE DESIGN.</a:t>
             </a:r>
           </a:p>
           <a:p/>
           <a:p>
             <a:r>
-              <a:t>Purpose: Names what should be coming back, without implying every assignment must produce immediate promotion or pay.</a:t>
-            </a:r>
-          </a:p>
-          <a:p>
-            <a:r>
-              <a:t>Hold: 9 to 10 seconds</a:t>
+              <a:t>Script: I would look in three places: capability, evidence, and recognition.</a:t>
+            </a:r>
+          </a:p>
+          <a:p/>
+          <a:p>
+            <a:r>
+              <a:t>Purpose: The third test, ending on the line the brief names as the major payoff of the section.</a:t>
+            </a:r>
+          </a:p>
+          <a:p>
+            <a:r>
+              <a:t>Hold: 11 to 13 seconds. The payoff line needs time to land.</a:t>
             </a:r>
           </a:p>
         </p:txBody>
@@ -1075,24 +1111,30 @@
           <a:p/>
           <a:p>
             <a:r>
-              <a:t>On screen: COMPLEXITY UP, AUTHORITY AND RETURN UP = REAL GROWTH  /  VOLUME ONLY UP = MORE LOAD</a:t>
+              <a:t>Status: COPY UPDATE</a:t>
             </a:r>
           </a:p>
           <a:p/>
           <a:p>
             <a:r>
-              <a:t>Script: "If Complexity, Authority, and Return are all expanding, you are probably looking at real growth."</a:t>
+              <a:t>On screen: CAR UP = GROWTH CASE VISIBLE / VOLUME ONLY UP = MORE LOAD</a:t>
             </a:r>
           </a:p>
           <a:p/>
           <a:p>
             <a:r>
-              <a:t>Purpose: Lets the viewer read their own pattern.</a:t>
-            </a:r>
-          </a:p>
-          <a:p>
-            <a:r>
-              <a:t>Hold: 9 to 10 seconds</a:t>
+              <a:t>Script: If Complexity, Authority, and Return are all expanding, the career case for growth is visible.</a:t>
+            </a:r>
+          </a:p>
+          <a:p/>
+          <a:p>
+            <a:r>
+              <a:t>Purpose: The read, in the script's own conditional language.</a:t>
+            </a:r>
+          </a:p>
+          <a:p>
+            <a:r>
+              <a:t>Hold: 8 to 9 seconds</a:t>
             </a:r>
           </a:p>
         </p:txBody>
@@ -1168,19 +1210,25 @@
           <a:p/>
           <a:p>
             <a:r>
+              <a:t>Status: REUSE</a:t>
+            </a:r>
+          </a:p>
+          <a:p/>
+          <a:p>
+            <a:r>
               <a:t>On screen: What should remain? / What should come off my plate?</a:t>
             </a:r>
           </a:p>
           <a:p/>
           <a:p>
             <a:r>
-              <a:t>Script: "Then take four questions into the conversation with your manager."</a:t>
+              <a:t>Script: Which of these responsibilities should remain with me?</a:t>
             </a:r>
           </a:p>
           <a:p/>
           <a:p>
             <a:r>
-              <a:t>Purpose: First half of the four questions. Split into two frames so each question stays large enough to read on a phone.</a:t>
+              <a:t>Purpose: The first half of the manager conversation, kept to two questions so each stays large enough to read on a phone.</a:t>
             </a:r>
           </a:p>
           <a:p>
@@ -1261,24 +1309,30 @@
           <a:p/>
           <a:p>
             <a:r>
+              <a:t>Status: REUSE</a:t>
+            </a:r>
+          </a:p>
+          <a:p/>
+          <a:p>
+            <a:r>
               <a:t>On screen: Which decisions belong to me? / When will this be reviewed?</a:t>
             </a:r>
           </a:p>
           <a:p/>
           <a:p>
             <a:r>
-              <a:t>Script: "Which decisions need to belong to me for these outcomes? And how and when will the expanded scope be formally reviewed?"</a:t>
+              <a:t>Script: Which decisions need to belong to me for these outcomes?</a:t>
             </a:r>
           </a:p>
           <a:p/>
           <a:p>
             <a:r>
-              <a:t>Purpose: Second half of the four questions. This is the frame a viewer will screenshot before a manager conversation.</a:t>
-            </a:r>
-          </a:p>
-          <a:p>
-            <a:r>
-              <a:t>Hold: 8 to 9 seconds</a:t>
+              <a:t>Purpose: The second half of the same conversation. Two frames rather than one four-question grid, for phone readability.</a:t>
+            </a:r>
+          </a:p>
+          <a:p>
+            <a:r>
+              <a:t>Hold: 7 to 8 seconds</a:t>
             </a:r>
           </a:p>
         </p:txBody>
@@ -1354,19 +1408,25 @@
           <a:p/>
           <a:p>
             <a:r>
+              <a:t>Status: REUSE</a:t>
+            </a:r>
+          </a:p>
+          <a:p/>
+          <a:p>
+            <a:r>
               <a:t>On screen: CAPABILITY FORMATION FIELD KIT / temidayoafonja.com/fieldkit</a:t>
             </a:r>
           </a:p>
           <a:p/>
           <a:p>
             <a:r>
-              <a:t>Script: "the Capability Formation Field Kit helps you read the evidence in your role. It is linked below."</a:t>
+              <a:t>Script: the Capability Formation Field Kit helps you read the evidence in your role</a:t>
             </a:r>
           </a:p>
           <a:p/>
           <a:p>
             <a:r>
-              <a:t>Purpose: The single primary product route in this video.</a:t>
+              <a:t>Purpose: The single product route, full screen.</a:t>
             </a:r>
           </a:p>
           <a:p>
@@ -5282,7 +5342,7 @@
         </p:nvSpPr>
         <p:spPr>
           <a:xfrm>
-            <a:off x="1016000" y="1790827"/>
+            <a:off x="1016000" y="2000758"/>
             <a:ext cx="10160000" cy="1524000"/>
           </a:xfrm>
           <a:prstGeom prst="rect">
@@ -5323,7 +5383,7 @@
         </p:nvSpPr>
         <p:spPr>
           <a:xfrm>
-            <a:off x="1016000" y="3306699"/>
+            <a:off x="1016000" y="3516630"/>
             <a:ext cx="4826000" cy="25400"/>
           </a:xfrm>
           <a:prstGeom prst="rect">
@@ -5367,7 +5427,7 @@
         </p:nvSpPr>
         <p:spPr>
           <a:xfrm>
-            <a:off x="1016000" y="3522599"/>
+            <a:off x="1016000" y="3732530"/>
             <a:ext cx="4826000" cy="1524000"/>
           </a:xfrm>
           <a:prstGeom prst="rect">
@@ -5395,19 +5455,7 @@
                 <a:ea typeface="Montserrat"/>
                 <a:cs typeface="Montserrat"/>
               </a:rPr>
-              <a:t>MORE UNITS OF</a:t>
-            </a:r>
-            <a:br/>
-            <a:r>
-              <a:rPr sz="2900" b="1" i="0">
-                <a:solidFill>
-                  <a:srgbClr val="112345"/>
-                </a:solidFill>
-                <a:latin typeface="Montserrat"/>
-                <a:ea typeface="Montserrat"/>
-                <a:cs typeface="Montserrat"/>
-              </a:rPr>
-              <a:t>THE SAME PROBLEM</a:t>
+              <a:t>MORE OF THE SAME</a:t>
             </a:r>
           </a:p>
         </p:txBody>
@@ -5420,7 +5468,7 @@
         </p:nvSpPr>
         <p:spPr>
           <a:xfrm>
-            <a:off x="1016000" y="4489323"/>
+            <a:off x="1016000" y="4279392"/>
             <a:ext cx="4826000" cy="1524000"/>
           </a:xfrm>
           <a:prstGeom prst="rect">
@@ -5461,7 +5509,7 @@
         </p:nvSpPr>
         <p:spPr>
           <a:xfrm>
-            <a:off x="6350000" y="3306699"/>
+            <a:off x="6350000" y="3516630"/>
             <a:ext cx="4826000" cy="25400"/>
           </a:xfrm>
           <a:prstGeom prst="rect">
@@ -5505,7 +5553,7 @@
         </p:nvSpPr>
         <p:spPr>
           <a:xfrm>
-            <a:off x="6350000" y="3522599"/>
+            <a:off x="6350000" y="3732530"/>
             <a:ext cx="4826000" cy="1524000"/>
           </a:xfrm>
           <a:prstGeom prst="rect">
@@ -5546,7 +5594,7 @@
         </p:nvSpPr>
         <p:spPr>
           <a:xfrm>
-            <a:off x="6350000" y="4069461"/>
+            <a:off x="6350000" y="4279392"/>
             <a:ext cx="4826000" cy="1524000"/>
           </a:xfrm>
           <a:prstGeom prst="rect">
@@ -5574,7 +5622,7 @@
                 <a:ea typeface="DM Sans"/>
                 <a:cs typeface="DM Sans"/>
               </a:rPr>
-              <a:t>Ambiguity  ·  Tradeoffs</a:t>
+              <a:t>Ambiguity · Tradeoffs</a:t>
             </a:r>
           </a:p>
         </p:txBody>
@@ -6168,7 +6216,7 @@
         </p:nvSpPr>
         <p:spPr>
           <a:xfrm>
-            <a:off x="1016000" y="2074037"/>
+            <a:off x="1016000" y="2137664"/>
             <a:ext cx="698500" cy="1524000"/>
           </a:xfrm>
           <a:prstGeom prst="rect">
@@ -6209,7 +6257,7 @@
         </p:nvSpPr>
         <p:spPr>
           <a:xfrm>
-            <a:off x="1854200" y="1997837"/>
+            <a:off x="1854200" y="2061464"/>
             <a:ext cx="9321800" cy="1524000"/>
           </a:xfrm>
           <a:prstGeom prst="rect">
@@ -6229,7 +6277,7 @@
               </a:lnSpc>
             </a:pPr>
             <a:r>
-              <a:rPr sz="3400" b="1" i="0">
+              <a:rPr sz="2800" b="1" i="0">
                 <a:solidFill>
                   <a:srgbClr val="F5F1E8"/>
                 </a:solidFill>
@@ -6250,7 +6298,7 @@
         </p:nvSpPr>
         <p:spPr>
           <a:xfrm>
-            <a:off x="1016000" y="2811653"/>
+            <a:off x="1016000" y="2789936"/>
             <a:ext cx="698500" cy="1524000"/>
           </a:xfrm>
           <a:prstGeom prst="rect">
@@ -6291,7 +6339,7 @@
         </p:nvSpPr>
         <p:spPr>
           <a:xfrm>
-            <a:off x="1854200" y="2735453"/>
+            <a:off x="1854200" y="2713736"/>
             <a:ext cx="9321800" cy="1524000"/>
           </a:xfrm>
           <a:prstGeom prst="rect">
@@ -6311,7 +6359,7 @@
               </a:lnSpc>
             </a:pPr>
             <a:r>
-              <a:rPr sz="3400" b="1" i="0">
+              <a:rPr sz="2800" b="1" i="0">
                 <a:solidFill>
                   <a:srgbClr val="F5F1E8"/>
                 </a:solidFill>
@@ -6332,7 +6380,7 @@
         </p:nvSpPr>
         <p:spPr>
           <a:xfrm>
-            <a:off x="1016000" y="3549269"/>
+            <a:off x="1016000" y="3442208"/>
             <a:ext cx="698500" cy="1524000"/>
           </a:xfrm>
           <a:prstGeom prst="rect">
@@ -6373,7 +6421,7 @@
         </p:nvSpPr>
         <p:spPr>
           <a:xfrm>
-            <a:off x="1854200" y="3473069"/>
+            <a:off x="1854200" y="3366008"/>
             <a:ext cx="9321800" cy="1524000"/>
           </a:xfrm>
           <a:prstGeom prst="rect">
@@ -6393,7 +6441,7 @@
               </a:lnSpc>
             </a:pPr>
             <a:r>
-              <a:rPr sz="3400" b="1" i="0">
+              <a:rPr sz="2800" b="1" i="0">
                 <a:solidFill>
                   <a:srgbClr val="F5F1E8"/>
                 </a:solidFill>
@@ -6414,7 +6462,7 @@
         </p:nvSpPr>
         <p:spPr>
           <a:xfrm>
-            <a:off x="1016000" y="4350385"/>
+            <a:off x="1016000" y="4157980"/>
             <a:ext cx="10160000" cy="1524000"/>
           </a:xfrm>
           <a:prstGeom prst="rect">
@@ -6430,19 +6478,19 @@
           <a:p>
             <a:pPr algn="l">
               <a:lnSpc>
-                <a:spcPct val="134000"/>
+                <a:spcPct val="116000"/>
               </a:lnSpc>
             </a:pPr>
             <a:r>
-              <a:rPr sz="2100" b="0" i="0">
+              <a:rPr sz="3300" b="1" i="0">
                 <a:solidFill>
-                  <a:srgbClr val="B9C3D2"/>
+                  <a:srgbClr val="F5F1E8"/>
                 </a:solidFill>
-                <a:latin typeface="DM Sans"/>
-                <a:ea typeface="DM Sans"/>
-                <a:cs typeface="DM Sans"/>
+                <a:latin typeface="Montserrat"/>
+                <a:ea typeface="Montserrat"/>
+                <a:cs typeface="Montserrat"/>
               </a:rPr>
-              <a:t>What did the work return?</a:t>
+              <a:t>Praise alone is not role design.</a:t>
             </a:r>
           </a:p>
         </p:txBody>
@@ -6715,7 +6763,19 @@
                 <a:ea typeface="Montserrat"/>
                 <a:cs typeface="Montserrat"/>
               </a:rPr>
-              <a:t>COMPLEXITY, AUTHORITY</a:t>
+              <a:t>COMPLEXITY,</a:t>
+            </a:r>
+            <a:br/>
+            <a:r>
+              <a:rPr sz="2900" b="1" i="0">
+                <a:solidFill>
+                  <a:srgbClr val="112345"/>
+                </a:solidFill>
+                <a:latin typeface="Montserrat"/>
+                <a:ea typeface="Montserrat"/>
+                <a:cs typeface="Montserrat"/>
+              </a:rPr>
+              <a:t>AUTHORITY</a:t>
             </a:r>
             <a:br/>
             <a:r>
@@ -6768,7 +6828,7 @@
                 <a:ea typeface="DM Sans"/>
                 <a:cs typeface="DM Sans"/>
               </a:rPr>
-              <a:t>Real growth.</a:t>
+              <a:t>Growth case visible.</a:t>
             </a:r>
           </a:p>
         </p:txBody>
